--- a/docs/Cairo-Quarantine-Ministry.pptx
+++ b/docs/Cairo-Quarantine-Ministry.pptx
@@ -5,30 +5,30 @@
     <p:sldMasterId id="2147483648" r:id="rId1"/>
   </p:sldMasterIdLst>
   <p:sldIdLst>
-    <p:sldId id="256" r:id="rId7"/>
-    <p:sldId id="257" r:id="rId8"/>
-    <p:sldId id="258" r:id="rId9"/>
-    <p:sldId id="259" r:id="rId10"/>
-    <p:sldId id="260" r:id="rId11"/>
-    <p:sldId id="261" r:id="rId12"/>
-    <p:sldId id="262" r:id="rId13"/>
-    <p:sldId id="263" r:id="rId14"/>
-    <p:sldId id="264" r:id="rId15"/>
-    <p:sldId id="265" r:id="rId16"/>
-    <p:sldId id="266" r:id="rId17"/>
-    <p:sldId id="267" r:id="rId18"/>
-    <p:sldId id="268" r:id="rId19"/>
-    <p:sldId id="269" r:id="rId20"/>
-    <p:sldId id="270" r:id="rId21"/>
-    <p:sldId id="271" r:id="rId22"/>
-    <p:sldId id="272" r:id="rId23"/>
-    <p:sldId id="273" r:id="rId24"/>
-    <p:sldId id="274" r:id="rId25"/>
-    <p:sldId id="275" r:id="rId26"/>
-    <p:sldId id="276" r:id="rId27"/>
-    <p:sldId id="277" r:id="rId28"/>
+    <p:sldId id="256" r:id="rId2"/>
+    <p:sldId id="257" r:id="rId3"/>
+    <p:sldId id="258" r:id="rId4"/>
+    <p:sldId id="259" r:id="rId5"/>
+    <p:sldId id="260" r:id="rId6"/>
+    <p:sldId id="261" r:id="rId7"/>
+    <p:sldId id="262" r:id="rId8"/>
+    <p:sldId id="263" r:id="rId9"/>
+    <p:sldId id="264" r:id="rId10"/>
+    <p:sldId id="265" r:id="rId11"/>
+    <p:sldId id="266" r:id="rId12"/>
+    <p:sldId id="267" r:id="rId13"/>
+    <p:sldId id="268" r:id="rId14"/>
+    <p:sldId id="269" r:id="rId15"/>
+    <p:sldId id="270" r:id="rId16"/>
+    <p:sldId id="271" r:id="rId17"/>
+    <p:sldId id="272" r:id="rId18"/>
+    <p:sldId id="273" r:id="rId19"/>
+    <p:sldId id="274" r:id="rId20"/>
+    <p:sldId id="275" r:id="rId21"/>
+    <p:sldId id="276" r:id="rId22"/>
+    <p:sldId id="277" r:id="rId23"/>
   </p:sldIdLst>
-  <p:sldSz cx="12191695" cy="6858000" type="screen4x3"/>
+  <p:sldSz cx="12192000" cy="6858000"/>
   <p:notesSz cx="6858000" cy="9144000"/>
   <p:defaultTextStyle>
     <a:defPPr>
@@ -125,6 +125,22 @@
       </a:defRPr>
     </a:lvl9pPr>
   </p:defaultTextStyle>
+  <p:extLst>
+    <p:ext uri="{EFAFB233-063F-42B5-8137-9DF3F51BA10A}">
+      <p15:sldGuideLst xmlns:p15="http://schemas.microsoft.com/office/powerpoint/2012/main">
+        <p15:guide id="1" orient="horz" pos="2160">
+          <p15:clr>
+            <a:srgbClr val="A4A3A4"/>
+          </p15:clr>
+        </p15:guide>
+        <p15:guide id="2" pos="2880">
+          <p15:clr>
+            <a:srgbClr val="A4A3A4"/>
+          </p15:clr>
+        </p15:guide>
+      </p15:sldGuideLst>
+    </p:ext>
+  </p:extLst>
 </p:presentation>
 </file>
 
@@ -166,10 +182,9 @@
           <a:lstStyle/>
           <a:p>
             <a:r>
-              <a:rPr lang="en-US" smtClean="0"/>
+              <a:rPr lang="en-US"/>
               <a:t>Click to edit Master title style</a:t>
             </a:r>
-            <a:endParaRPr lang="en-US"/>
           </a:p>
         </p:txBody>
       </p:sp>
@@ -285,10 +300,9 @@
           </a:lstStyle>
           <a:p>
             <a:r>
-              <a:rPr lang="en-US" smtClean="0"/>
+              <a:rPr lang="en-US"/>
               <a:t>Click to edit Master subtitle style</a:t>
             </a:r>
-            <a:endParaRPr lang="en-US"/>
           </a:p>
         </p:txBody>
       </p:sp>
@@ -309,7 +323,7 @@
           <a:p>
             <a:fld id="{5BCAD085-E8A6-8845-BD4E-CB4CCA059FC4}" type="datetimeFigureOut">
               <a:rPr lang="en-US" smtClean="0"/>
-              <a:t>1/27/13</a:t>
+              <a:t>5/24/26</a:t>
             </a:fld>
             <a:endParaRPr lang="en-US"/>
           </a:p>
@@ -403,10 +417,9 @@
           <a:lstStyle/>
           <a:p>
             <a:r>
-              <a:rPr lang="en-US" smtClean="0"/>
+              <a:rPr lang="en-US"/>
               <a:t>Click to edit Master title style</a:t>
             </a:r>
-            <a:endParaRPr lang="en-US"/>
           </a:p>
         </p:txBody>
       </p:sp>
@@ -427,38 +440,37 @@
           <a:p>
             <a:pPr lvl="0"/>
             <a:r>
-              <a:rPr lang="en-US" smtClean="0"/>
+              <a:rPr lang="en-US"/>
               <a:t>Click to edit Master text styles</a:t>
             </a:r>
           </a:p>
           <a:p>
             <a:pPr lvl="1"/>
             <a:r>
-              <a:rPr lang="en-US" smtClean="0"/>
+              <a:rPr lang="en-US"/>
               <a:t>Second level</a:t>
             </a:r>
           </a:p>
           <a:p>
             <a:pPr lvl="2"/>
             <a:r>
-              <a:rPr lang="en-US" smtClean="0"/>
+              <a:rPr lang="en-US"/>
               <a:t>Third level</a:t>
             </a:r>
           </a:p>
           <a:p>
             <a:pPr lvl="3"/>
             <a:r>
-              <a:rPr lang="en-US" smtClean="0"/>
+              <a:rPr lang="en-US"/>
               <a:t>Fourth level</a:t>
             </a:r>
           </a:p>
           <a:p>
             <a:pPr lvl="4"/>
             <a:r>
-              <a:rPr lang="en-US" smtClean="0"/>
+              <a:rPr lang="en-US"/>
               <a:t>Fifth level</a:t>
             </a:r>
-            <a:endParaRPr lang="en-US"/>
           </a:p>
         </p:txBody>
       </p:sp>
@@ -479,7 +491,7 @@
           <a:p>
             <a:fld id="{5BCAD085-E8A6-8845-BD4E-CB4CCA059FC4}" type="datetimeFigureOut">
               <a:rPr lang="en-US" smtClean="0"/>
-              <a:t>1/27/13</a:t>
+              <a:t>5/24/26</a:t>
             </a:fld>
             <a:endParaRPr lang="en-US"/>
           </a:p>
@@ -578,10 +590,9 @@
           <a:lstStyle/>
           <a:p>
             <a:r>
-              <a:rPr lang="en-US" smtClean="0"/>
+              <a:rPr lang="en-US"/>
               <a:t>Click to edit Master title style</a:t>
             </a:r>
-            <a:endParaRPr lang="en-US"/>
           </a:p>
         </p:txBody>
       </p:sp>
@@ -607,38 +618,37 @@
           <a:p>
             <a:pPr lvl="0"/>
             <a:r>
-              <a:rPr lang="en-US" smtClean="0"/>
+              <a:rPr lang="en-US"/>
               <a:t>Click to edit Master text styles</a:t>
             </a:r>
           </a:p>
           <a:p>
             <a:pPr lvl="1"/>
             <a:r>
-              <a:rPr lang="en-US" smtClean="0"/>
+              <a:rPr lang="en-US"/>
               <a:t>Second level</a:t>
             </a:r>
           </a:p>
           <a:p>
             <a:pPr lvl="2"/>
             <a:r>
-              <a:rPr lang="en-US" smtClean="0"/>
+              <a:rPr lang="en-US"/>
               <a:t>Third level</a:t>
             </a:r>
           </a:p>
           <a:p>
             <a:pPr lvl="3"/>
             <a:r>
-              <a:rPr lang="en-US" smtClean="0"/>
+              <a:rPr lang="en-US"/>
               <a:t>Fourth level</a:t>
             </a:r>
           </a:p>
           <a:p>
             <a:pPr lvl="4"/>
             <a:r>
-              <a:rPr lang="en-US" smtClean="0"/>
+              <a:rPr lang="en-US"/>
               <a:t>Fifth level</a:t>
             </a:r>
-            <a:endParaRPr lang="en-US"/>
           </a:p>
         </p:txBody>
       </p:sp>
@@ -659,7 +669,7 @@
           <a:p>
             <a:fld id="{5BCAD085-E8A6-8845-BD4E-CB4CCA059FC4}" type="datetimeFigureOut">
               <a:rPr lang="en-US" smtClean="0"/>
-              <a:t>1/27/13</a:t>
+              <a:t>5/24/26</a:t>
             </a:fld>
             <a:endParaRPr lang="en-US"/>
           </a:p>
@@ -753,10 +763,9 @@
           <a:lstStyle/>
           <a:p>
             <a:r>
-              <a:rPr lang="en-US" smtClean="0"/>
+              <a:rPr lang="en-US"/>
               <a:t>Click to edit Master title style</a:t>
             </a:r>
-            <a:endParaRPr lang="en-US"/>
           </a:p>
         </p:txBody>
       </p:sp>
@@ -777,38 +786,37 @@
           <a:p>
             <a:pPr lvl="0"/>
             <a:r>
-              <a:rPr lang="en-US" smtClean="0"/>
+              <a:rPr lang="en-US"/>
               <a:t>Click to edit Master text styles</a:t>
             </a:r>
           </a:p>
           <a:p>
             <a:pPr lvl="1"/>
             <a:r>
-              <a:rPr lang="en-US" smtClean="0"/>
+              <a:rPr lang="en-US"/>
               <a:t>Second level</a:t>
             </a:r>
           </a:p>
           <a:p>
             <a:pPr lvl="2"/>
             <a:r>
-              <a:rPr lang="en-US" smtClean="0"/>
+              <a:rPr lang="en-US"/>
               <a:t>Third level</a:t>
             </a:r>
           </a:p>
           <a:p>
             <a:pPr lvl="3"/>
             <a:r>
-              <a:rPr lang="en-US" smtClean="0"/>
+              <a:rPr lang="en-US"/>
               <a:t>Fourth level</a:t>
             </a:r>
           </a:p>
           <a:p>
             <a:pPr lvl="4"/>
             <a:r>
-              <a:rPr lang="en-US" smtClean="0"/>
+              <a:rPr lang="en-US"/>
               <a:t>Fifth level</a:t>
             </a:r>
-            <a:endParaRPr lang="en-US"/>
           </a:p>
         </p:txBody>
       </p:sp>
@@ -829,7 +837,7 @@
           <a:p>
             <a:fld id="{5BCAD085-E8A6-8845-BD4E-CB4CCA059FC4}" type="datetimeFigureOut">
               <a:rPr lang="en-US" smtClean="0"/>
-              <a:t>1/27/13</a:t>
+              <a:t>5/24/26</a:t>
             </a:fld>
             <a:endParaRPr lang="en-US"/>
           </a:p>
@@ -932,10 +940,9 @@
           </a:lstStyle>
           <a:p>
             <a:r>
-              <a:rPr lang="en-US" smtClean="0"/>
+              <a:rPr lang="en-US"/>
               <a:t>Click to edit Master title style</a:t>
             </a:r>
-            <a:endParaRPr lang="en-US"/>
           </a:p>
         </p:txBody>
       </p:sp>
@@ -1052,7 +1059,7 @@
           <a:p>
             <a:pPr lvl="0"/>
             <a:r>
-              <a:rPr lang="en-US" smtClean="0"/>
+              <a:rPr lang="en-US"/>
               <a:t>Click to edit Master text styles</a:t>
             </a:r>
           </a:p>
@@ -1075,7 +1082,7 @@
           <a:p>
             <a:fld id="{5BCAD085-E8A6-8845-BD4E-CB4CCA059FC4}" type="datetimeFigureOut">
               <a:rPr lang="en-US" smtClean="0"/>
-              <a:t>1/27/13</a:t>
+              <a:t>5/24/26</a:t>
             </a:fld>
             <a:endParaRPr lang="en-US"/>
           </a:p>
@@ -1169,10 +1176,9 @@
           <a:lstStyle/>
           <a:p>
             <a:r>
-              <a:rPr lang="en-US" smtClean="0"/>
+              <a:rPr lang="en-US"/>
               <a:t>Click to edit Master title style</a:t>
             </a:r>
-            <a:endParaRPr lang="en-US"/>
           </a:p>
         </p:txBody>
       </p:sp>
@@ -1226,38 +1232,37 @@
           <a:p>
             <a:pPr lvl="0"/>
             <a:r>
-              <a:rPr lang="en-US" smtClean="0"/>
+              <a:rPr lang="en-US"/>
               <a:t>Click to edit Master text styles</a:t>
             </a:r>
           </a:p>
           <a:p>
             <a:pPr lvl="1"/>
             <a:r>
-              <a:rPr lang="en-US" smtClean="0"/>
+              <a:rPr lang="en-US"/>
               <a:t>Second level</a:t>
             </a:r>
           </a:p>
           <a:p>
             <a:pPr lvl="2"/>
             <a:r>
-              <a:rPr lang="en-US" smtClean="0"/>
+              <a:rPr lang="en-US"/>
               <a:t>Third level</a:t>
             </a:r>
           </a:p>
           <a:p>
             <a:pPr lvl="3"/>
             <a:r>
-              <a:rPr lang="en-US" smtClean="0"/>
+              <a:rPr lang="en-US"/>
               <a:t>Fourth level</a:t>
             </a:r>
           </a:p>
           <a:p>
             <a:pPr lvl="4"/>
             <a:r>
-              <a:rPr lang="en-US" smtClean="0"/>
+              <a:rPr lang="en-US"/>
               <a:t>Fifth level</a:t>
             </a:r>
-            <a:endParaRPr lang="en-US"/>
           </a:p>
         </p:txBody>
       </p:sp>
@@ -1311,38 +1316,37 @@
           <a:p>
             <a:pPr lvl="0"/>
             <a:r>
-              <a:rPr lang="en-US" smtClean="0"/>
+              <a:rPr lang="en-US"/>
               <a:t>Click to edit Master text styles</a:t>
             </a:r>
           </a:p>
           <a:p>
             <a:pPr lvl="1"/>
             <a:r>
-              <a:rPr lang="en-US" smtClean="0"/>
+              <a:rPr lang="en-US"/>
               <a:t>Second level</a:t>
             </a:r>
           </a:p>
           <a:p>
             <a:pPr lvl="2"/>
             <a:r>
-              <a:rPr lang="en-US" smtClean="0"/>
+              <a:rPr lang="en-US"/>
               <a:t>Third level</a:t>
             </a:r>
           </a:p>
           <a:p>
             <a:pPr lvl="3"/>
             <a:r>
-              <a:rPr lang="en-US" smtClean="0"/>
+              <a:rPr lang="en-US"/>
               <a:t>Fourth level</a:t>
             </a:r>
           </a:p>
           <a:p>
             <a:pPr lvl="4"/>
             <a:r>
-              <a:rPr lang="en-US" smtClean="0"/>
+              <a:rPr lang="en-US"/>
               <a:t>Fifth level</a:t>
             </a:r>
-            <a:endParaRPr lang="en-US"/>
           </a:p>
         </p:txBody>
       </p:sp>
@@ -1363,7 +1367,7 @@
           <a:p>
             <a:fld id="{5BCAD085-E8A6-8845-BD4E-CB4CCA059FC4}" type="datetimeFigureOut">
               <a:rPr lang="en-US" smtClean="0"/>
-              <a:t>1/27/13</a:t>
+              <a:t>5/24/26</a:t>
             </a:fld>
             <a:endParaRPr lang="en-US"/>
           </a:p>
@@ -1461,10 +1465,9 @@
           </a:lstStyle>
           <a:p>
             <a:r>
-              <a:rPr lang="en-US" smtClean="0"/>
+              <a:rPr lang="en-US"/>
               <a:t>Click to edit Master title style</a:t>
             </a:r>
-            <a:endParaRPr lang="en-US"/>
           </a:p>
         </p:txBody>
       </p:sp>
@@ -1527,7 +1530,7 @@
           <a:p>
             <a:pPr lvl="0"/>
             <a:r>
-              <a:rPr lang="en-US" smtClean="0"/>
+              <a:rPr lang="en-US"/>
               <a:t>Click to edit Master text styles</a:t>
             </a:r>
           </a:p>
@@ -1583,38 +1586,37 @@
           <a:p>
             <a:pPr lvl="0"/>
             <a:r>
-              <a:rPr lang="en-US" smtClean="0"/>
+              <a:rPr lang="en-US"/>
               <a:t>Click to edit Master text styles</a:t>
             </a:r>
           </a:p>
           <a:p>
             <a:pPr lvl="1"/>
             <a:r>
-              <a:rPr lang="en-US" smtClean="0"/>
+              <a:rPr lang="en-US"/>
               <a:t>Second level</a:t>
             </a:r>
           </a:p>
           <a:p>
             <a:pPr lvl="2"/>
             <a:r>
-              <a:rPr lang="en-US" smtClean="0"/>
+              <a:rPr lang="en-US"/>
               <a:t>Third level</a:t>
             </a:r>
           </a:p>
           <a:p>
             <a:pPr lvl="3"/>
             <a:r>
-              <a:rPr lang="en-US" smtClean="0"/>
+              <a:rPr lang="en-US"/>
               <a:t>Fourth level</a:t>
             </a:r>
           </a:p>
           <a:p>
             <a:pPr lvl="4"/>
             <a:r>
-              <a:rPr lang="en-US" smtClean="0"/>
+              <a:rPr lang="en-US"/>
               <a:t>Fifth level</a:t>
             </a:r>
-            <a:endParaRPr lang="en-US"/>
           </a:p>
         </p:txBody>
       </p:sp>
@@ -1677,7 +1679,7 @@
           <a:p>
             <a:pPr lvl="0"/>
             <a:r>
-              <a:rPr lang="en-US" smtClean="0"/>
+              <a:rPr lang="en-US"/>
               <a:t>Click to edit Master text styles</a:t>
             </a:r>
           </a:p>
@@ -1733,38 +1735,37 @@
           <a:p>
             <a:pPr lvl="0"/>
             <a:r>
-              <a:rPr lang="en-US" smtClean="0"/>
+              <a:rPr lang="en-US"/>
               <a:t>Click to edit Master text styles</a:t>
             </a:r>
           </a:p>
           <a:p>
             <a:pPr lvl="1"/>
             <a:r>
-              <a:rPr lang="en-US" smtClean="0"/>
+              <a:rPr lang="en-US"/>
               <a:t>Second level</a:t>
             </a:r>
           </a:p>
           <a:p>
             <a:pPr lvl="2"/>
             <a:r>
-              <a:rPr lang="en-US" smtClean="0"/>
+              <a:rPr lang="en-US"/>
               <a:t>Third level</a:t>
             </a:r>
           </a:p>
           <a:p>
             <a:pPr lvl="3"/>
             <a:r>
-              <a:rPr lang="en-US" smtClean="0"/>
+              <a:rPr lang="en-US"/>
               <a:t>Fourth level</a:t>
             </a:r>
           </a:p>
           <a:p>
             <a:pPr lvl="4"/>
             <a:r>
-              <a:rPr lang="en-US" smtClean="0"/>
+              <a:rPr lang="en-US"/>
               <a:t>Fifth level</a:t>
             </a:r>
-            <a:endParaRPr lang="en-US"/>
           </a:p>
         </p:txBody>
       </p:sp>
@@ -1785,7 +1786,7 @@
           <a:p>
             <a:fld id="{5BCAD085-E8A6-8845-BD4E-CB4CCA059FC4}" type="datetimeFigureOut">
               <a:rPr lang="en-US" smtClean="0"/>
-              <a:t>1/27/13</a:t>
+              <a:t>5/24/26</a:t>
             </a:fld>
             <a:endParaRPr lang="en-US"/>
           </a:p>
@@ -1879,10 +1880,9 @@
           <a:lstStyle/>
           <a:p>
             <a:r>
-              <a:rPr lang="en-US" smtClean="0"/>
+              <a:rPr lang="en-US"/>
               <a:t>Click to edit Master title style</a:t>
             </a:r>
-            <a:endParaRPr lang="en-US"/>
           </a:p>
         </p:txBody>
       </p:sp>
@@ -1903,7 +1903,7 @@
           <a:p>
             <a:fld id="{5BCAD085-E8A6-8845-BD4E-CB4CCA059FC4}" type="datetimeFigureOut">
               <a:rPr lang="en-US" smtClean="0"/>
-              <a:t>1/27/13</a:t>
+              <a:t>5/24/26</a:t>
             </a:fld>
             <a:endParaRPr lang="en-US"/>
           </a:p>
@@ -1998,7 +1998,7 @@
           <a:p>
             <a:fld id="{5BCAD085-E8A6-8845-BD4E-CB4CCA059FC4}" type="datetimeFigureOut">
               <a:rPr lang="en-US" smtClean="0"/>
-              <a:t>1/27/13</a:t>
+              <a:t>5/24/26</a:t>
             </a:fld>
             <a:endParaRPr lang="en-US"/>
           </a:p>
@@ -2101,10 +2101,9 @@
           </a:lstStyle>
           <a:p>
             <a:r>
-              <a:rPr lang="en-US" smtClean="0"/>
+              <a:rPr lang="en-US"/>
               <a:t>Click to edit Master title style</a:t>
             </a:r>
-            <a:endParaRPr lang="en-US"/>
           </a:p>
         </p:txBody>
       </p:sp>
@@ -2158,38 +2157,37 @@
           <a:p>
             <a:pPr lvl="0"/>
             <a:r>
-              <a:rPr lang="en-US" smtClean="0"/>
+              <a:rPr lang="en-US"/>
               <a:t>Click to edit Master text styles</a:t>
             </a:r>
           </a:p>
           <a:p>
             <a:pPr lvl="1"/>
             <a:r>
-              <a:rPr lang="en-US" smtClean="0"/>
+              <a:rPr lang="en-US"/>
               <a:t>Second level</a:t>
             </a:r>
           </a:p>
           <a:p>
             <a:pPr lvl="2"/>
             <a:r>
-              <a:rPr lang="en-US" smtClean="0"/>
+              <a:rPr lang="en-US"/>
               <a:t>Third level</a:t>
             </a:r>
           </a:p>
           <a:p>
             <a:pPr lvl="3"/>
             <a:r>
-              <a:rPr lang="en-US" smtClean="0"/>
+              <a:rPr lang="en-US"/>
               <a:t>Fourth level</a:t>
             </a:r>
           </a:p>
           <a:p>
             <a:pPr lvl="4"/>
             <a:r>
-              <a:rPr lang="en-US" smtClean="0"/>
+              <a:rPr lang="en-US"/>
               <a:t>Fifth level</a:t>
             </a:r>
-            <a:endParaRPr lang="en-US"/>
           </a:p>
         </p:txBody>
       </p:sp>
@@ -2252,7 +2250,7 @@
           <a:p>
             <a:pPr lvl="0"/>
             <a:r>
-              <a:rPr lang="en-US" smtClean="0"/>
+              <a:rPr lang="en-US"/>
               <a:t>Click to edit Master text styles</a:t>
             </a:r>
           </a:p>
@@ -2275,7 +2273,7 @@
           <a:p>
             <a:fld id="{5BCAD085-E8A6-8845-BD4E-CB4CCA059FC4}" type="datetimeFigureOut">
               <a:rPr lang="en-US" smtClean="0"/>
-              <a:t>1/27/13</a:t>
+              <a:t>5/24/26</a:t>
             </a:fld>
             <a:endParaRPr lang="en-US"/>
           </a:p>
@@ -2378,10 +2376,9 @@
           </a:lstStyle>
           <a:p>
             <a:r>
-              <a:rPr lang="en-US" smtClean="0"/>
+              <a:rPr lang="en-US"/>
               <a:t>Click to edit Master title style</a:t>
             </a:r>
-            <a:endParaRPr lang="en-US"/>
           </a:p>
         </p:txBody>
       </p:sp>
@@ -2505,7 +2502,7 @@
           <a:p>
             <a:pPr lvl="0"/>
             <a:r>
-              <a:rPr lang="en-US" smtClean="0"/>
+              <a:rPr lang="en-US"/>
               <a:t>Click to edit Master text styles</a:t>
             </a:r>
           </a:p>
@@ -2528,7 +2525,7 @@
           <a:p>
             <a:fld id="{5BCAD085-E8A6-8845-BD4E-CB4CCA059FC4}" type="datetimeFigureOut">
               <a:rPr lang="en-US" smtClean="0"/>
-              <a:t>1/27/13</a:t>
+              <a:t>5/24/26</a:t>
             </a:fld>
             <a:endParaRPr lang="en-US"/>
           </a:p>
@@ -2637,10 +2634,9 @@
           <a:lstStyle/>
           <a:p>
             <a:r>
-              <a:rPr lang="en-US" smtClean="0"/>
+              <a:rPr lang="en-US"/>
               <a:t>Click to edit Master title style</a:t>
             </a:r>
-            <a:endParaRPr lang="en-US"/>
           </a:p>
         </p:txBody>
       </p:sp>
@@ -2671,38 +2667,37 @@
           <a:p>
             <a:pPr lvl="0"/>
             <a:r>
-              <a:rPr lang="en-US" smtClean="0"/>
+              <a:rPr lang="en-US"/>
               <a:t>Click to edit Master text styles</a:t>
             </a:r>
           </a:p>
           <a:p>
             <a:pPr lvl="1"/>
             <a:r>
-              <a:rPr lang="en-US" smtClean="0"/>
+              <a:rPr lang="en-US"/>
               <a:t>Second level</a:t>
             </a:r>
           </a:p>
           <a:p>
             <a:pPr lvl="2"/>
             <a:r>
-              <a:rPr lang="en-US" smtClean="0"/>
+              <a:rPr lang="en-US"/>
               <a:t>Third level</a:t>
             </a:r>
           </a:p>
           <a:p>
             <a:pPr lvl="3"/>
             <a:r>
-              <a:rPr lang="en-US" smtClean="0"/>
+              <a:rPr lang="en-US"/>
               <a:t>Fourth level</a:t>
             </a:r>
           </a:p>
           <a:p>
             <a:pPr lvl="4"/>
             <a:r>
-              <a:rPr lang="en-US" smtClean="0"/>
+              <a:rPr lang="en-US"/>
               <a:t>Fifth level</a:t>
             </a:r>
-            <a:endParaRPr lang="en-US"/>
           </a:p>
         </p:txBody>
       </p:sp>
@@ -2741,7 +2736,7 @@
           <a:p>
             <a:fld id="{5BCAD085-E8A6-8845-BD4E-CB4CCA059FC4}" type="datetimeFigureOut">
               <a:rPr lang="en-US" smtClean="0"/>
-              <a:t>1/27/13</a:t>
+              <a:t>5/24/26</a:t>
             </a:fld>
             <a:endParaRPr lang="en-US"/>
           </a:p>
@@ -3100,7 +3095,7 @@
 </file>
 
 <file path=ppt/slides/slide1.xml><?xml version="1.0" encoding="utf-8"?>
-<p:sld xmlns:a="http://schemas.openxmlformats.org/drawingml/2006/main" xmlns:p="http://schemas.openxmlformats.org/presentationml/2006/main" xmlns:r="http://schemas.openxmlformats.org/officeDocument/2006/relationships">
+<p:sld xmlns:a="http://schemas.openxmlformats.org/drawingml/2006/main" xmlns:r="http://schemas.openxmlformats.org/officeDocument/2006/relationships" xmlns:p="http://schemas.openxmlformats.org/presentationml/2006/main">
   <p:cSld>
     <p:spTree>
       <p:nvGrpSpPr>
@@ -3108,7 +3103,14 @@
         <p:cNvGrpSpPr/>
         <p:nvPr/>
       </p:nvGrpSpPr>
-      <p:grpSpPr/>
+      <p:grpSpPr>
+        <a:xfrm>
+          <a:off x="0" y="0"/>
+          <a:ext cx="0" cy="0"/>
+          <a:chOff x="0" y="0"/>
+          <a:chExt cx="0" cy="0"/>
+        </a:xfrm>
+      </p:grpSpPr>
       <p:sp>
         <p:nvSpPr>
           <p:cNvPr id="2" name="Rectangle 1"/>
@@ -3149,6 +3151,7 @@
           <a:lstStyle/>
           <a:p>
             <a:pPr algn="ctr"/>
+            <a:endParaRPr/>
           </a:p>
         </p:txBody>
       </p:sp>
@@ -3192,6 +3195,7 @@
           <a:lstStyle/>
           <a:p>
             <a:pPr algn="ctr"/>
+            <a:endParaRPr/>
           </a:p>
         </p:txBody>
       </p:sp>
@@ -3278,7 +3282,7 @@
 </file>
 
 <file path=ppt/slides/slide10.xml><?xml version="1.0" encoding="utf-8"?>
-<p:sld xmlns:a="http://schemas.openxmlformats.org/drawingml/2006/main" xmlns:p="http://schemas.openxmlformats.org/presentationml/2006/main" xmlns:r="http://schemas.openxmlformats.org/officeDocument/2006/relationships">
+<p:sld xmlns:a="http://schemas.openxmlformats.org/drawingml/2006/main" xmlns:r="http://schemas.openxmlformats.org/officeDocument/2006/relationships" xmlns:p="http://schemas.openxmlformats.org/presentationml/2006/main">
   <p:cSld>
     <p:spTree>
       <p:nvGrpSpPr>
@@ -3286,7 +3290,14 @@
         <p:cNvGrpSpPr/>
         <p:nvPr/>
       </p:nvGrpSpPr>
-      <p:grpSpPr/>
+      <p:grpSpPr>
+        <a:xfrm>
+          <a:off x="0" y="0"/>
+          <a:ext cx="0" cy="0"/>
+          <a:chOff x="0" y="0"/>
+          <a:chExt cx="0" cy="0"/>
+        </a:xfrm>
+      </p:grpSpPr>
       <p:sp>
         <p:nvSpPr>
           <p:cNvPr id="2" name="Rectangle 1"/>
@@ -3327,6 +3338,7 @@
           <a:lstStyle/>
           <a:p>
             <a:pPr algn="ctr"/>
+            <a:endParaRPr/>
           </a:p>
         </p:txBody>
       </p:sp>
@@ -3370,6 +3382,7 @@
           <a:lstStyle/>
           <a:p>
             <a:pPr algn="ctr"/>
+            <a:endParaRPr/>
           </a:p>
         </p:txBody>
       </p:sp>
@@ -3531,7 +3544,7 @@
 </file>
 
 <file path=ppt/slides/slide11.xml><?xml version="1.0" encoding="utf-8"?>
-<p:sld xmlns:a="http://schemas.openxmlformats.org/drawingml/2006/main" xmlns:p="http://schemas.openxmlformats.org/presentationml/2006/main" xmlns:r="http://schemas.openxmlformats.org/officeDocument/2006/relationships">
+<p:sld xmlns:a="http://schemas.openxmlformats.org/drawingml/2006/main" xmlns:r="http://schemas.openxmlformats.org/officeDocument/2006/relationships" xmlns:p="http://schemas.openxmlformats.org/presentationml/2006/main">
   <p:cSld>
     <p:spTree>
       <p:nvGrpSpPr>
@@ -3539,7 +3552,14 @@
         <p:cNvGrpSpPr/>
         <p:nvPr/>
       </p:nvGrpSpPr>
-      <p:grpSpPr/>
+      <p:grpSpPr>
+        <a:xfrm>
+          <a:off x="0" y="0"/>
+          <a:ext cx="0" cy="0"/>
+          <a:chOff x="0" y="0"/>
+          <a:chExt cx="0" cy="0"/>
+        </a:xfrm>
+      </p:grpSpPr>
       <p:sp>
         <p:nvSpPr>
           <p:cNvPr id="2" name="Rectangle 1"/>
@@ -3580,6 +3600,7 @@
           <a:lstStyle/>
           <a:p>
             <a:pPr algn="ctr"/>
+            <a:endParaRPr/>
           </a:p>
         </p:txBody>
       </p:sp>
@@ -3623,6 +3644,7 @@
           <a:lstStyle/>
           <a:p>
             <a:pPr algn="ctr"/>
+            <a:endParaRPr/>
           </a:p>
         </p:txBody>
       </p:sp>
@@ -3784,7 +3806,7 @@
         <p:spPr>
           <a:xfrm>
             <a:off x="2926080" y="3200400"/>
-            <a:ext cx="4707432" cy="3200400"/>
+            <a:ext cx="4881966" cy="3200400"/>
           </a:xfrm>
           <a:prstGeom prst="rect">
             <a:avLst/>
@@ -3800,7 +3822,7 @@
 </file>
 
 <file path=ppt/slides/slide12.xml><?xml version="1.0" encoding="utf-8"?>
-<p:sld xmlns:a="http://schemas.openxmlformats.org/drawingml/2006/main" xmlns:p="http://schemas.openxmlformats.org/presentationml/2006/main" xmlns:r="http://schemas.openxmlformats.org/officeDocument/2006/relationships">
+<p:sld xmlns:a="http://schemas.openxmlformats.org/drawingml/2006/main" xmlns:r="http://schemas.openxmlformats.org/officeDocument/2006/relationships" xmlns:p="http://schemas.openxmlformats.org/presentationml/2006/main">
   <p:cSld>
     <p:spTree>
       <p:nvGrpSpPr>
@@ -3808,7 +3830,14 @@
         <p:cNvGrpSpPr/>
         <p:nvPr/>
       </p:nvGrpSpPr>
-      <p:grpSpPr/>
+      <p:grpSpPr>
+        <a:xfrm>
+          <a:off x="0" y="0"/>
+          <a:ext cx="0" cy="0"/>
+          <a:chOff x="0" y="0"/>
+          <a:chExt cx="0" cy="0"/>
+        </a:xfrm>
+      </p:grpSpPr>
       <p:sp>
         <p:nvSpPr>
           <p:cNvPr id="2" name="Rectangle 1"/>
@@ -3849,6 +3878,7 @@
           <a:lstStyle/>
           <a:p>
             <a:pPr algn="ctr"/>
+            <a:endParaRPr/>
           </a:p>
         </p:txBody>
       </p:sp>
@@ -3892,6 +3922,7 @@
           <a:lstStyle/>
           <a:p>
             <a:pPr algn="ctr"/>
+            <a:endParaRPr/>
           </a:p>
         </p:txBody>
       </p:sp>
@@ -4069,7 +4100,7 @@
 </file>
 
 <file path=ppt/slides/slide13.xml><?xml version="1.0" encoding="utf-8"?>
-<p:sld xmlns:a="http://schemas.openxmlformats.org/drawingml/2006/main" xmlns:p="http://schemas.openxmlformats.org/presentationml/2006/main" xmlns:r="http://schemas.openxmlformats.org/officeDocument/2006/relationships">
+<p:sld xmlns:a="http://schemas.openxmlformats.org/drawingml/2006/main" xmlns:r="http://schemas.openxmlformats.org/officeDocument/2006/relationships" xmlns:p="http://schemas.openxmlformats.org/presentationml/2006/main">
   <p:cSld>
     <p:spTree>
       <p:nvGrpSpPr>
@@ -4077,7 +4108,14 @@
         <p:cNvGrpSpPr/>
         <p:nvPr/>
       </p:nvGrpSpPr>
-      <p:grpSpPr/>
+      <p:grpSpPr>
+        <a:xfrm>
+          <a:off x="0" y="0"/>
+          <a:ext cx="0" cy="0"/>
+          <a:chOff x="0" y="0"/>
+          <a:chExt cx="0" cy="0"/>
+        </a:xfrm>
+      </p:grpSpPr>
       <p:sp>
         <p:nvSpPr>
           <p:cNvPr id="2" name="Rectangle 1"/>
@@ -4118,6 +4156,7 @@
           <a:lstStyle/>
           <a:p>
             <a:pPr algn="ctr"/>
+            <a:endParaRPr/>
           </a:p>
         </p:txBody>
       </p:sp>
@@ -4161,6 +4200,7 @@
           <a:lstStyle/>
           <a:p>
             <a:pPr algn="ctr"/>
+            <a:endParaRPr/>
           </a:p>
         </p:txBody>
       </p:sp>
@@ -4362,7 +4402,7 @@
 </file>
 
 <file path=ppt/slides/slide14.xml><?xml version="1.0" encoding="utf-8"?>
-<p:sld xmlns:a="http://schemas.openxmlformats.org/drawingml/2006/main" xmlns:p="http://schemas.openxmlformats.org/presentationml/2006/main" xmlns:r="http://schemas.openxmlformats.org/officeDocument/2006/relationships">
+<p:sld xmlns:a="http://schemas.openxmlformats.org/drawingml/2006/main" xmlns:r="http://schemas.openxmlformats.org/officeDocument/2006/relationships" xmlns:p="http://schemas.openxmlformats.org/presentationml/2006/main">
   <p:cSld>
     <p:spTree>
       <p:nvGrpSpPr>
@@ -4370,7 +4410,14 @@
         <p:cNvGrpSpPr/>
         <p:nvPr/>
       </p:nvGrpSpPr>
-      <p:grpSpPr/>
+      <p:grpSpPr>
+        <a:xfrm>
+          <a:off x="0" y="0"/>
+          <a:ext cx="0" cy="0"/>
+          <a:chOff x="0" y="0"/>
+          <a:chExt cx="0" cy="0"/>
+        </a:xfrm>
+      </p:grpSpPr>
       <p:sp>
         <p:nvSpPr>
           <p:cNvPr id="2" name="Rectangle 1"/>
@@ -4411,6 +4458,7 @@
           <a:lstStyle/>
           <a:p>
             <a:pPr algn="ctr"/>
+            <a:endParaRPr/>
           </a:p>
         </p:txBody>
       </p:sp>
@@ -4454,6 +4502,7 @@
           <a:lstStyle/>
           <a:p>
             <a:pPr algn="ctr"/>
+            <a:endParaRPr/>
           </a:p>
         </p:txBody>
       </p:sp>
@@ -4655,7 +4704,7 @@
 </file>
 
 <file path=ppt/slides/slide15.xml><?xml version="1.0" encoding="utf-8"?>
-<p:sld xmlns:a="http://schemas.openxmlformats.org/drawingml/2006/main" xmlns:p="http://schemas.openxmlformats.org/presentationml/2006/main" xmlns:r="http://schemas.openxmlformats.org/officeDocument/2006/relationships">
+<p:sld xmlns:a="http://schemas.openxmlformats.org/drawingml/2006/main" xmlns:r="http://schemas.openxmlformats.org/officeDocument/2006/relationships" xmlns:p="http://schemas.openxmlformats.org/presentationml/2006/main">
   <p:cSld>
     <p:spTree>
       <p:nvGrpSpPr>
@@ -4663,7 +4712,14 @@
         <p:cNvGrpSpPr/>
         <p:nvPr/>
       </p:nvGrpSpPr>
-      <p:grpSpPr/>
+      <p:grpSpPr>
+        <a:xfrm>
+          <a:off x="0" y="0"/>
+          <a:ext cx="0" cy="0"/>
+          <a:chOff x="0" y="0"/>
+          <a:chExt cx="0" cy="0"/>
+        </a:xfrm>
+      </p:grpSpPr>
       <p:sp>
         <p:nvSpPr>
           <p:cNvPr id="2" name="Rectangle 1"/>
@@ -4704,6 +4760,7 @@
           <a:lstStyle/>
           <a:p>
             <a:pPr algn="ctr"/>
+            <a:endParaRPr/>
           </a:p>
         </p:txBody>
       </p:sp>
@@ -4747,6 +4804,7 @@
           <a:lstStyle/>
           <a:p>
             <a:pPr algn="ctr"/>
+            <a:endParaRPr/>
           </a:p>
         </p:txBody>
       </p:sp>
@@ -4924,7 +4982,7 @@
         <p:spPr>
           <a:xfrm>
             <a:off x="320040" y="3520440"/>
-            <a:ext cx="4681728" cy="2926080"/>
+            <a:ext cx="2591362" cy="2926080"/>
           </a:xfrm>
           <a:prstGeom prst="rect">
             <a:avLst/>
@@ -4948,7 +5006,7 @@
         <p:spPr>
           <a:xfrm>
             <a:off x="6263640" y="3520440"/>
-            <a:ext cx="5201920" cy="2926080"/>
+            <a:ext cx="4681728" cy="2926080"/>
           </a:xfrm>
           <a:prstGeom prst="rect">
             <a:avLst/>
@@ -4964,7 +5022,7 @@
 </file>
 
 <file path=ppt/slides/slide16.xml><?xml version="1.0" encoding="utf-8"?>
-<p:sld xmlns:a="http://schemas.openxmlformats.org/drawingml/2006/main" xmlns:p="http://schemas.openxmlformats.org/presentationml/2006/main" xmlns:r="http://schemas.openxmlformats.org/officeDocument/2006/relationships">
+<p:sld xmlns:a="http://schemas.openxmlformats.org/drawingml/2006/main" xmlns:r="http://schemas.openxmlformats.org/officeDocument/2006/relationships" xmlns:p="http://schemas.openxmlformats.org/presentationml/2006/main">
   <p:cSld>
     <p:spTree>
       <p:nvGrpSpPr>
@@ -4972,7 +5030,14 @@
         <p:cNvGrpSpPr/>
         <p:nvPr/>
       </p:nvGrpSpPr>
-      <p:grpSpPr/>
+      <p:grpSpPr>
+        <a:xfrm>
+          <a:off x="0" y="0"/>
+          <a:ext cx="0" cy="0"/>
+          <a:chOff x="0" y="0"/>
+          <a:chExt cx="0" cy="0"/>
+        </a:xfrm>
+      </p:grpSpPr>
       <p:sp>
         <p:nvSpPr>
           <p:cNvPr id="2" name="Rectangle 1"/>
@@ -5013,6 +5078,7 @@
           <a:lstStyle/>
           <a:p>
             <a:pPr algn="ctr"/>
+            <a:endParaRPr/>
           </a:p>
         </p:txBody>
       </p:sp>
@@ -5056,6 +5122,7 @@
           <a:lstStyle/>
           <a:p>
             <a:pPr algn="ctr"/>
+            <a:endParaRPr/>
           </a:p>
         </p:txBody>
       </p:sp>
@@ -5202,7 +5269,7 @@
       </p:sp>
       <p:pic>
         <p:nvPicPr>
-          <p:cNvPr id="7" name="Picture 6" descr="12-admin-requests-ar.png"/>
+          <p:cNvPr id="7" name="Picture 6" descr="15-admin-offices-ar.png"/>
           <p:cNvPicPr>
             <a:picLocks noChangeAspect="1"/>
           </p:cNvPicPr>
@@ -5217,7 +5284,7 @@
         <p:spPr>
           <a:xfrm>
             <a:off x="2926080" y="3200400"/>
-            <a:ext cx="5120640" cy="3200400"/>
+            <a:ext cx="1439730" cy="3200400"/>
           </a:xfrm>
           <a:prstGeom prst="rect">
             <a:avLst/>
@@ -5233,7 +5300,7 @@
 </file>
 
 <file path=ppt/slides/slide17.xml><?xml version="1.0" encoding="utf-8"?>
-<p:sld xmlns:a="http://schemas.openxmlformats.org/drawingml/2006/main" xmlns:p="http://schemas.openxmlformats.org/presentationml/2006/main" xmlns:r="http://schemas.openxmlformats.org/officeDocument/2006/relationships">
+<p:sld xmlns:a="http://schemas.openxmlformats.org/drawingml/2006/main" xmlns:r="http://schemas.openxmlformats.org/officeDocument/2006/relationships" xmlns:p="http://schemas.openxmlformats.org/presentationml/2006/main">
   <p:cSld>
     <p:spTree>
       <p:nvGrpSpPr>
@@ -5241,7 +5308,14 @@
         <p:cNvGrpSpPr/>
         <p:nvPr/>
       </p:nvGrpSpPr>
-      <p:grpSpPr/>
+      <p:grpSpPr>
+        <a:xfrm>
+          <a:off x="0" y="0"/>
+          <a:ext cx="0" cy="0"/>
+          <a:chOff x="0" y="0"/>
+          <a:chExt cx="0" cy="0"/>
+        </a:xfrm>
+      </p:grpSpPr>
       <p:sp>
         <p:nvSpPr>
           <p:cNvPr id="2" name="Rectangle 1"/>
@@ -5282,6 +5356,7 @@
           <a:lstStyle/>
           <a:p>
             <a:pPr algn="ctr"/>
+            <a:endParaRPr/>
           </a:p>
         </p:txBody>
       </p:sp>
@@ -5325,6 +5400,7 @@
           <a:lstStyle/>
           <a:p>
             <a:pPr algn="ctr"/>
+            <a:endParaRPr/>
           </a:p>
         </p:txBody>
       </p:sp>
@@ -5471,7 +5547,7 @@
       </p:sp>
       <p:pic>
         <p:nvPicPr>
-          <p:cNvPr id="7" name="Picture 6" descr="19-admin-office-queue-ar.png"/>
+          <p:cNvPr id="7" name="Picture 6" descr="20-admin-vaccines-ar.png"/>
           <p:cNvPicPr>
             <a:picLocks noChangeAspect="1"/>
           </p:cNvPicPr>
@@ -5486,7 +5562,7 @@
         <p:spPr>
           <a:xfrm>
             <a:off x="320040" y="3520440"/>
-            <a:ext cx="4681728" cy="2926080"/>
+            <a:ext cx="2922021" cy="2926080"/>
           </a:xfrm>
           <a:prstGeom prst="rect">
             <a:avLst/>
@@ -5510,7 +5586,7 @@
         <p:spPr>
           <a:xfrm>
             <a:off x="6263640" y="3520440"/>
-            <a:ext cx="4681728" cy="2926080"/>
+            <a:ext cx="368156" cy="2926080"/>
           </a:xfrm>
           <a:prstGeom prst="rect">
             <a:avLst/>
@@ -5526,7 +5602,7 @@
 </file>
 
 <file path=ppt/slides/slide18.xml><?xml version="1.0" encoding="utf-8"?>
-<p:sld xmlns:a="http://schemas.openxmlformats.org/drawingml/2006/main" xmlns:p="http://schemas.openxmlformats.org/presentationml/2006/main" xmlns:r="http://schemas.openxmlformats.org/officeDocument/2006/relationships">
+<p:sld xmlns:a="http://schemas.openxmlformats.org/drawingml/2006/main" xmlns:r="http://schemas.openxmlformats.org/officeDocument/2006/relationships" xmlns:p="http://schemas.openxmlformats.org/presentationml/2006/main">
   <p:cSld>
     <p:spTree>
       <p:nvGrpSpPr>
@@ -5534,7 +5610,14 @@
         <p:cNvGrpSpPr/>
         <p:nvPr/>
       </p:nvGrpSpPr>
-      <p:grpSpPr/>
+      <p:grpSpPr>
+        <a:xfrm>
+          <a:off x="0" y="0"/>
+          <a:ext cx="0" cy="0"/>
+          <a:chOff x="0" y="0"/>
+          <a:chExt cx="0" cy="0"/>
+        </a:xfrm>
+      </p:grpSpPr>
       <p:sp>
         <p:nvSpPr>
           <p:cNvPr id="2" name="Rectangle 1"/>
@@ -5575,6 +5658,7 @@
           <a:lstStyle/>
           <a:p>
             <a:pPr algn="ctr"/>
+            <a:endParaRPr/>
           </a:p>
         </p:txBody>
       </p:sp>
@@ -5618,6 +5702,7 @@
           <a:lstStyle/>
           <a:p>
             <a:pPr algn="ctr"/>
+            <a:endParaRPr/>
           </a:p>
         </p:txBody>
       </p:sp>
@@ -5768,6 +5853,7 @@
           <a:lstStyle/>
           <a:p>
             <a:pPr algn="ctr"/>
+            <a:endParaRPr/>
           </a:p>
         </p:txBody>
       </p:sp>
@@ -5883,6 +5969,7 @@
           <a:lstStyle/>
           <a:p>
             <a:pPr algn="ctr"/>
+            <a:endParaRPr/>
           </a:p>
         </p:txBody>
       </p:sp>
@@ -5965,7 +6052,7 @@
 </file>
 
 <file path=ppt/slides/slide19.xml><?xml version="1.0" encoding="utf-8"?>
-<p:sld xmlns:a="http://schemas.openxmlformats.org/drawingml/2006/main" xmlns:p="http://schemas.openxmlformats.org/presentationml/2006/main" xmlns:r="http://schemas.openxmlformats.org/officeDocument/2006/relationships">
+<p:sld xmlns:a="http://schemas.openxmlformats.org/drawingml/2006/main" xmlns:r="http://schemas.openxmlformats.org/officeDocument/2006/relationships" xmlns:p="http://schemas.openxmlformats.org/presentationml/2006/main">
   <p:cSld>
     <p:spTree>
       <p:nvGrpSpPr>
@@ -5973,7 +6060,14 @@
         <p:cNvGrpSpPr/>
         <p:nvPr/>
       </p:nvGrpSpPr>
-      <p:grpSpPr/>
+      <p:grpSpPr>
+        <a:xfrm>
+          <a:off x="0" y="0"/>
+          <a:ext cx="0" cy="0"/>
+          <a:chOff x="0" y="0"/>
+          <a:chExt cx="0" cy="0"/>
+        </a:xfrm>
+      </p:grpSpPr>
       <p:sp>
         <p:nvSpPr>
           <p:cNvPr id="2" name="Rectangle 1"/>
@@ -6014,6 +6108,7 @@
           <a:lstStyle/>
           <a:p>
             <a:pPr algn="ctr"/>
+            <a:endParaRPr/>
           </a:p>
         </p:txBody>
       </p:sp>
@@ -6057,6 +6152,7 @@
           <a:lstStyle/>
           <a:p>
             <a:pPr algn="ctr"/>
+            <a:endParaRPr/>
           </a:p>
         </p:txBody>
       </p:sp>
@@ -6149,8 +6245,20 @@
                 <a:tableStyleId>{5C22544A-7EE6-4342-B048-85BDC9FD1C3A}</a:tableStyleId>
               </a:tblPr>
               <a:tblGrid>
-                <a:gridCol w="4983480"/>
-                <a:gridCol w="4983480"/>
+                <a:gridCol w="4983480">
+                  <a:extLst>
+                    <a:ext uri="{9D8B030D-6E8A-4147-A177-3AD203B41FA5}">
+                      <a16:colId xmlns:a16="http://schemas.microsoft.com/office/drawing/2014/main" val="20000"/>
+                    </a:ext>
+                  </a:extLst>
+                </a:gridCol>
+                <a:gridCol w="4983480">
+                  <a:extLst>
+                    <a:ext uri="{9D8B030D-6E8A-4147-A177-3AD203B41FA5}">
+                      <a16:colId xmlns:a16="http://schemas.microsoft.com/office/drawing/2014/main" val="20001"/>
+                    </a:ext>
+                  </a:extLst>
+                </a:gridCol>
               </a:tblGrid>
               <a:tr h="320040">
                 <a:tc>
@@ -6199,6 +6307,11 @@
                     </a:solidFill>
                   </a:tcPr>
                 </a:tc>
+                <a:extLst>
+                  <a:ext uri="{0D108BD9-81ED-4DB2-BD59-A6C34878D82A}">
+                    <a16:rowId xmlns:a16="http://schemas.microsoft.com/office/drawing/2014/main" val="10000"/>
+                  </a:ext>
+                </a:extLst>
               </a:tr>
               <a:tr h="320040">
                 <a:tc>
@@ -6239,6 +6352,11 @@
                   </a:txBody>
                   <a:tcPr/>
                 </a:tc>
+                <a:extLst>
+                  <a:ext uri="{0D108BD9-81ED-4DB2-BD59-A6C34878D82A}">
+                    <a16:rowId xmlns:a16="http://schemas.microsoft.com/office/drawing/2014/main" val="10001"/>
+                  </a:ext>
+                </a:extLst>
               </a:tr>
               <a:tr h="320040">
                 <a:tc>
@@ -6287,6 +6405,11 @@
                     </a:solidFill>
                   </a:tcPr>
                 </a:tc>
+                <a:extLst>
+                  <a:ext uri="{0D108BD9-81ED-4DB2-BD59-A6C34878D82A}">
+                    <a16:rowId xmlns:a16="http://schemas.microsoft.com/office/drawing/2014/main" val="10002"/>
+                  </a:ext>
+                </a:extLst>
               </a:tr>
               <a:tr h="320040">
                 <a:tc>
@@ -6327,6 +6450,11 @@
                   </a:txBody>
                   <a:tcPr/>
                 </a:tc>
+                <a:extLst>
+                  <a:ext uri="{0D108BD9-81ED-4DB2-BD59-A6C34878D82A}">
+                    <a16:rowId xmlns:a16="http://schemas.microsoft.com/office/drawing/2014/main" val="10003"/>
+                  </a:ext>
+                </a:extLst>
               </a:tr>
               <a:tr h="320040">
                 <a:tc>
@@ -6375,6 +6503,11 @@
                     </a:solidFill>
                   </a:tcPr>
                 </a:tc>
+                <a:extLst>
+                  <a:ext uri="{0D108BD9-81ED-4DB2-BD59-A6C34878D82A}">
+                    <a16:rowId xmlns:a16="http://schemas.microsoft.com/office/drawing/2014/main" val="10004"/>
+                  </a:ext>
+                </a:extLst>
               </a:tr>
             </a:tbl>
           </a:graphicData>
@@ -6389,7 +6522,7 @@
 </file>
 
 <file path=ppt/slides/slide2.xml><?xml version="1.0" encoding="utf-8"?>
-<p:sld xmlns:a="http://schemas.openxmlformats.org/drawingml/2006/main" xmlns:p="http://schemas.openxmlformats.org/presentationml/2006/main" xmlns:r="http://schemas.openxmlformats.org/officeDocument/2006/relationships">
+<p:sld xmlns:a="http://schemas.openxmlformats.org/drawingml/2006/main" xmlns:r="http://schemas.openxmlformats.org/officeDocument/2006/relationships" xmlns:p="http://schemas.openxmlformats.org/presentationml/2006/main">
   <p:cSld>
     <p:spTree>
       <p:nvGrpSpPr>
@@ -6397,7 +6530,14 @@
         <p:cNvGrpSpPr/>
         <p:nvPr/>
       </p:nvGrpSpPr>
-      <p:grpSpPr/>
+      <p:grpSpPr>
+        <a:xfrm>
+          <a:off x="0" y="0"/>
+          <a:ext cx="0" cy="0"/>
+          <a:chOff x="0" y="0"/>
+          <a:chExt cx="0" cy="0"/>
+        </a:xfrm>
+      </p:grpSpPr>
       <p:sp>
         <p:nvSpPr>
           <p:cNvPr id="2" name="Rectangle 1"/>
@@ -6438,6 +6578,7 @@
           <a:lstStyle/>
           <a:p>
             <a:pPr algn="ctr"/>
+            <a:endParaRPr/>
           </a:p>
         </p:txBody>
       </p:sp>
@@ -6481,6 +6622,7 @@
           <a:lstStyle/>
           <a:p>
             <a:pPr algn="ctr"/>
+            <a:endParaRPr/>
           </a:p>
         </p:txBody>
       </p:sp>
@@ -6634,7 +6776,7 @@
 </file>
 
 <file path=ppt/slides/slide20.xml><?xml version="1.0" encoding="utf-8"?>
-<p:sld xmlns:a="http://schemas.openxmlformats.org/drawingml/2006/main" xmlns:p="http://schemas.openxmlformats.org/presentationml/2006/main" xmlns:r="http://schemas.openxmlformats.org/officeDocument/2006/relationships">
+<p:sld xmlns:a="http://schemas.openxmlformats.org/drawingml/2006/main" xmlns:r="http://schemas.openxmlformats.org/officeDocument/2006/relationships" xmlns:p="http://schemas.openxmlformats.org/presentationml/2006/main">
   <p:cSld>
     <p:spTree>
       <p:nvGrpSpPr>
@@ -6642,7 +6784,14 @@
         <p:cNvGrpSpPr/>
         <p:nvPr/>
       </p:nvGrpSpPr>
-      <p:grpSpPr/>
+      <p:grpSpPr>
+        <a:xfrm>
+          <a:off x="0" y="0"/>
+          <a:ext cx="0" cy="0"/>
+          <a:chOff x="0" y="0"/>
+          <a:chExt cx="0" cy="0"/>
+        </a:xfrm>
+      </p:grpSpPr>
       <p:sp>
         <p:nvSpPr>
           <p:cNvPr id="2" name="Rectangle 1"/>
@@ -6683,6 +6832,7 @@
           <a:lstStyle/>
           <a:p>
             <a:pPr algn="ctr"/>
+            <a:endParaRPr/>
           </a:p>
         </p:txBody>
       </p:sp>
@@ -6726,6 +6876,7 @@
           <a:lstStyle/>
           <a:p>
             <a:pPr algn="ctr"/>
+            <a:endParaRPr/>
           </a:p>
         </p:txBody>
       </p:sp>
@@ -6879,7 +7030,7 @@
 </file>
 
 <file path=ppt/slides/slide21.xml><?xml version="1.0" encoding="utf-8"?>
-<p:sld xmlns:a="http://schemas.openxmlformats.org/drawingml/2006/main" xmlns:p="http://schemas.openxmlformats.org/presentationml/2006/main" xmlns:r="http://schemas.openxmlformats.org/officeDocument/2006/relationships">
+<p:sld xmlns:a="http://schemas.openxmlformats.org/drawingml/2006/main" xmlns:r="http://schemas.openxmlformats.org/officeDocument/2006/relationships" xmlns:p="http://schemas.openxmlformats.org/presentationml/2006/main">
   <p:cSld>
     <p:spTree>
       <p:nvGrpSpPr>
@@ -6887,7 +7038,14 @@
         <p:cNvGrpSpPr/>
         <p:nvPr/>
       </p:nvGrpSpPr>
-      <p:grpSpPr/>
+      <p:grpSpPr>
+        <a:xfrm>
+          <a:off x="0" y="0"/>
+          <a:ext cx="0" cy="0"/>
+          <a:chOff x="0" y="0"/>
+          <a:chExt cx="0" cy="0"/>
+        </a:xfrm>
+      </p:grpSpPr>
       <p:sp>
         <p:nvSpPr>
           <p:cNvPr id="2" name="Rectangle 1"/>
@@ -6928,6 +7086,7 @@
           <a:lstStyle/>
           <a:p>
             <a:pPr algn="ctr"/>
+            <a:endParaRPr/>
           </a:p>
         </p:txBody>
       </p:sp>
@@ -6971,6 +7130,7 @@
           <a:lstStyle/>
           <a:p>
             <a:pPr algn="ctr"/>
+            <a:endParaRPr/>
           </a:p>
         </p:txBody>
       </p:sp>
@@ -7172,7 +7332,7 @@
 </file>
 
 <file path=ppt/slides/slide22.xml><?xml version="1.0" encoding="utf-8"?>
-<p:sld xmlns:a="http://schemas.openxmlformats.org/drawingml/2006/main" xmlns:p="http://schemas.openxmlformats.org/presentationml/2006/main" xmlns:r="http://schemas.openxmlformats.org/officeDocument/2006/relationships">
+<p:sld xmlns:a="http://schemas.openxmlformats.org/drawingml/2006/main" xmlns:r="http://schemas.openxmlformats.org/officeDocument/2006/relationships" xmlns:p="http://schemas.openxmlformats.org/presentationml/2006/main">
   <p:cSld>
     <p:spTree>
       <p:nvGrpSpPr>
@@ -7180,7 +7340,14 @@
         <p:cNvGrpSpPr/>
         <p:nvPr/>
       </p:nvGrpSpPr>
-      <p:grpSpPr/>
+      <p:grpSpPr>
+        <a:xfrm>
+          <a:off x="0" y="0"/>
+          <a:ext cx="0" cy="0"/>
+          <a:chOff x="0" y="0"/>
+          <a:chExt cx="0" cy="0"/>
+        </a:xfrm>
+      </p:grpSpPr>
       <p:sp>
         <p:nvSpPr>
           <p:cNvPr id="2" name="Rectangle 1"/>
@@ -7221,6 +7388,7 @@
           <a:lstStyle/>
           <a:p>
             <a:pPr algn="ctr"/>
+            <a:endParaRPr/>
           </a:p>
         </p:txBody>
       </p:sp>
@@ -7264,6 +7432,7 @@
           <a:lstStyle/>
           <a:p>
             <a:pPr algn="ctr"/>
+            <a:endParaRPr/>
           </a:p>
         </p:txBody>
       </p:sp>
@@ -7350,7 +7519,7 @@
 </file>
 
 <file path=ppt/slides/slide3.xml><?xml version="1.0" encoding="utf-8"?>
-<p:sld xmlns:a="http://schemas.openxmlformats.org/drawingml/2006/main" xmlns:p="http://schemas.openxmlformats.org/presentationml/2006/main" xmlns:r="http://schemas.openxmlformats.org/officeDocument/2006/relationships">
+<p:sld xmlns:a="http://schemas.openxmlformats.org/drawingml/2006/main" xmlns:r="http://schemas.openxmlformats.org/officeDocument/2006/relationships" xmlns:p="http://schemas.openxmlformats.org/presentationml/2006/main">
   <p:cSld>
     <p:spTree>
       <p:nvGrpSpPr>
@@ -7358,7 +7527,14 @@
         <p:cNvGrpSpPr/>
         <p:nvPr/>
       </p:nvGrpSpPr>
-      <p:grpSpPr/>
+      <p:grpSpPr>
+        <a:xfrm>
+          <a:off x="0" y="0"/>
+          <a:ext cx="0" cy="0"/>
+          <a:chOff x="0" y="0"/>
+          <a:chExt cx="0" cy="0"/>
+        </a:xfrm>
+      </p:grpSpPr>
       <p:sp>
         <p:nvSpPr>
           <p:cNvPr id="2" name="Rectangle 1"/>
@@ -7399,6 +7575,7 @@
           <a:lstStyle/>
           <a:p>
             <a:pPr algn="ctr"/>
+            <a:endParaRPr/>
           </a:p>
         </p:txBody>
       </p:sp>
@@ -7442,6 +7619,7 @@
           <a:lstStyle/>
           <a:p>
             <a:pPr algn="ctr"/>
+            <a:endParaRPr/>
           </a:p>
         </p:txBody>
       </p:sp>
@@ -7595,7 +7773,7 @@
 </file>
 
 <file path=ppt/slides/slide4.xml><?xml version="1.0" encoding="utf-8"?>
-<p:sld xmlns:a="http://schemas.openxmlformats.org/drawingml/2006/main" xmlns:p="http://schemas.openxmlformats.org/presentationml/2006/main" xmlns:r="http://schemas.openxmlformats.org/officeDocument/2006/relationships">
+<p:sld xmlns:a="http://schemas.openxmlformats.org/drawingml/2006/main" xmlns:r="http://schemas.openxmlformats.org/officeDocument/2006/relationships" xmlns:p="http://schemas.openxmlformats.org/presentationml/2006/main">
   <p:cSld>
     <p:spTree>
       <p:nvGrpSpPr>
@@ -7603,7 +7781,14 @@
         <p:cNvGrpSpPr/>
         <p:nvPr/>
       </p:nvGrpSpPr>
-      <p:grpSpPr/>
+      <p:grpSpPr>
+        <a:xfrm>
+          <a:off x="0" y="0"/>
+          <a:ext cx="0" cy="0"/>
+          <a:chOff x="0" y="0"/>
+          <a:chExt cx="0" cy="0"/>
+        </a:xfrm>
+      </p:grpSpPr>
       <p:sp>
         <p:nvSpPr>
           <p:cNvPr id="2" name="Rectangle 1"/>
@@ -7644,6 +7829,7 @@
           <a:lstStyle/>
           <a:p>
             <a:pPr algn="ctr"/>
+            <a:endParaRPr/>
           </a:p>
         </p:txBody>
       </p:sp>
@@ -7687,6 +7873,7 @@
           <a:lstStyle/>
           <a:p>
             <a:pPr algn="ctr"/>
+            <a:endParaRPr/>
           </a:p>
         </p:txBody>
       </p:sp>
@@ -7848,7 +8035,7 @@
         <p:spPr>
           <a:xfrm>
             <a:off x="2926080" y="3200400"/>
-            <a:ext cx="4707432" cy="3200400"/>
+            <a:ext cx="4881966" cy="3200400"/>
           </a:xfrm>
           <a:prstGeom prst="rect">
             <a:avLst/>
@@ -7864,7 +8051,7 @@
 </file>
 
 <file path=ppt/slides/slide5.xml><?xml version="1.0" encoding="utf-8"?>
-<p:sld xmlns:a="http://schemas.openxmlformats.org/drawingml/2006/main" xmlns:p="http://schemas.openxmlformats.org/presentationml/2006/main" xmlns:r="http://schemas.openxmlformats.org/officeDocument/2006/relationships">
+<p:sld xmlns:a="http://schemas.openxmlformats.org/drawingml/2006/main" xmlns:r="http://schemas.openxmlformats.org/officeDocument/2006/relationships" xmlns:p="http://schemas.openxmlformats.org/presentationml/2006/main">
   <p:cSld>
     <p:spTree>
       <p:nvGrpSpPr>
@@ -7872,7 +8059,14 @@
         <p:cNvGrpSpPr/>
         <p:nvPr/>
       </p:nvGrpSpPr>
-      <p:grpSpPr/>
+      <p:grpSpPr>
+        <a:xfrm>
+          <a:off x="0" y="0"/>
+          <a:ext cx="0" cy="0"/>
+          <a:chOff x="0" y="0"/>
+          <a:chExt cx="0" cy="0"/>
+        </a:xfrm>
+      </p:grpSpPr>
       <p:sp>
         <p:nvSpPr>
           <p:cNvPr id="2" name="Rectangle 1"/>
@@ -7913,6 +8107,7 @@
           <a:lstStyle/>
           <a:p>
             <a:pPr algn="ctr"/>
+            <a:endParaRPr/>
           </a:p>
         </p:txBody>
       </p:sp>
@@ -7956,6 +8151,7 @@
           <a:lstStyle/>
           <a:p>
             <a:pPr algn="ctr"/>
+            <a:endParaRPr/>
           </a:p>
         </p:txBody>
       </p:sp>
@@ -8117,7 +8313,7 @@
 </file>
 
 <file path=ppt/slides/slide6.xml><?xml version="1.0" encoding="utf-8"?>
-<p:sld xmlns:a="http://schemas.openxmlformats.org/drawingml/2006/main" xmlns:p="http://schemas.openxmlformats.org/presentationml/2006/main" xmlns:r="http://schemas.openxmlformats.org/officeDocument/2006/relationships">
+<p:sld xmlns:a="http://schemas.openxmlformats.org/drawingml/2006/main" xmlns:r="http://schemas.openxmlformats.org/officeDocument/2006/relationships" xmlns:p="http://schemas.openxmlformats.org/presentationml/2006/main">
   <p:cSld>
     <p:spTree>
       <p:nvGrpSpPr>
@@ -8125,7 +8321,14 @@
         <p:cNvGrpSpPr/>
         <p:nvPr/>
       </p:nvGrpSpPr>
-      <p:grpSpPr/>
+      <p:grpSpPr>
+        <a:xfrm>
+          <a:off x="0" y="0"/>
+          <a:ext cx="0" cy="0"/>
+          <a:chOff x="0" y="0"/>
+          <a:chExt cx="0" cy="0"/>
+        </a:xfrm>
+      </p:grpSpPr>
       <p:sp>
         <p:nvSpPr>
           <p:cNvPr id="2" name="Rectangle 1"/>
@@ -8166,6 +8369,7 @@
           <a:lstStyle/>
           <a:p>
             <a:pPr algn="ctr"/>
+            <a:endParaRPr/>
           </a:p>
         </p:txBody>
       </p:sp>
@@ -8209,6 +8413,7 @@
           <a:lstStyle/>
           <a:p>
             <a:pPr algn="ctr"/>
+            <a:endParaRPr/>
           </a:p>
         </p:txBody>
       </p:sp>
@@ -8450,7 +8655,7 @@
 </file>
 
 <file path=ppt/slides/slide7.xml><?xml version="1.0" encoding="utf-8"?>
-<p:sld xmlns:a="http://schemas.openxmlformats.org/drawingml/2006/main" xmlns:p="http://schemas.openxmlformats.org/presentationml/2006/main" xmlns:r="http://schemas.openxmlformats.org/officeDocument/2006/relationships">
+<p:sld xmlns:a="http://schemas.openxmlformats.org/drawingml/2006/main" xmlns:r="http://schemas.openxmlformats.org/officeDocument/2006/relationships" xmlns:p="http://schemas.openxmlformats.org/presentationml/2006/main">
   <p:cSld>
     <p:spTree>
       <p:nvGrpSpPr>
@@ -8458,7 +8663,14 @@
         <p:cNvGrpSpPr/>
         <p:nvPr/>
       </p:nvGrpSpPr>
-      <p:grpSpPr/>
+      <p:grpSpPr>
+        <a:xfrm>
+          <a:off x="0" y="0"/>
+          <a:ext cx="0" cy="0"/>
+          <a:chOff x="0" y="0"/>
+          <a:chExt cx="0" cy="0"/>
+        </a:xfrm>
+      </p:grpSpPr>
       <p:sp>
         <p:nvSpPr>
           <p:cNvPr id="2" name="Rectangle 1"/>
@@ -8499,6 +8711,7 @@
           <a:lstStyle/>
           <a:p>
             <a:pPr algn="ctr"/>
+            <a:endParaRPr/>
           </a:p>
         </p:txBody>
       </p:sp>
@@ -8542,6 +8755,7 @@
           <a:lstStyle/>
           <a:p>
             <a:pPr algn="ctr"/>
+            <a:endParaRPr/>
           </a:p>
         </p:txBody>
       </p:sp>
@@ -8703,7 +8917,7 @@
 </file>
 
 <file path=ppt/slides/slide8.xml><?xml version="1.0" encoding="utf-8"?>
-<p:sld xmlns:a="http://schemas.openxmlformats.org/drawingml/2006/main" xmlns:p="http://schemas.openxmlformats.org/presentationml/2006/main" xmlns:r="http://schemas.openxmlformats.org/officeDocument/2006/relationships">
+<p:sld xmlns:a="http://schemas.openxmlformats.org/drawingml/2006/main" xmlns:r="http://schemas.openxmlformats.org/officeDocument/2006/relationships" xmlns:p="http://schemas.openxmlformats.org/presentationml/2006/main">
   <p:cSld>
     <p:spTree>
       <p:nvGrpSpPr>
@@ -8711,7 +8925,14 @@
         <p:cNvGrpSpPr/>
         <p:nvPr/>
       </p:nvGrpSpPr>
-      <p:grpSpPr/>
+      <p:grpSpPr>
+        <a:xfrm>
+          <a:off x="0" y="0"/>
+          <a:ext cx="0" cy="0"/>
+          <a:chOff x="0" y="0"/>
+          <a:chExt cx="0" cy="0"/>
+        </a:xfrm>
+      </p:grpSpPr>
       <p:sp>
         <p:nvSpPr>
           <p:cNvPr id="2" name="Rectangle 1"/>
@@ -8752,6 +8973,7 @@
           <a:lstStyle/>
           <a:p>
             <a:pPr algn="ctr"/>
+            <a:endParaRPr/>
           </a:p>
         </p:txBody>
       </p:sp>
@@ -8795,6 +9017,7 @@
           <a:lstStyle/>
           <a:p>
             <a:pPr algn="ctr"/>
+            <a:endParaRPr/>
           </a:p>
         </p:txBody>
       </p:sp>
@@ -8972,7 +9195,7 @@
 </file>
 
 <file path=ppt/slides/slide9.xml><?xml version="1.0" encoding="utf-8"?>
-<p:sld xmlns:a="http://schemas.openxmlformats.org/drawingml/2006/main" xmlns:p="http://schemas.openxmlformats.org/presentationml/2006/main" xmlns:r="http://schemas.openxmlformats.org/officeDocument/2006/relationships">
+<p:sld xmlns:a="http://schemas.openxmlformats.org/drawingml/2006/main" xmlns:r="http://schemas.openxmlformats.org/officeDocument/2006/relationships" xmlns:p="http://schemas.openxmlformats.org/presentationml/2006/main">
   <p:cSld>
     <p:spTree>
       <p:nvGrpSpPr>
@@ -8980,7 +9203,14 @@
         <p:cNvGrpSpPr/>
         <p:nvPr/>
       </p:nvGrpSpPr>
-      <p:grpSpPr/>
+      <p:grpSpPr>
+        <a:xfrm>
+          <a:off x="0" y="0"/>
+          <a:ext cx="0" cy="0"/>
+          <a:chOff x="0" y="0"/>
+          <a:chExt cx="0" cy="0"/>
+        </a:xfrm>
+      </p:grpSpPr>
       <p:sp>
         <p:nvSpPr>
           <p:cNvPr id="2" name="Rectangle 1"/>
@@ -9021,6 +9251,7 @@
           <a:lstStyle/>
           <a:p>
             <a:pPr algn="ctr"/>
+            <a:endParaRPr/>
           </a:p>
         </p:txBody>
       </p:sp>
@@ -9064,6 +9295,7 @@
           <a:lstStyle/>
           <a:p>
             <a:pPr algn="ctr"/>
+            <a:endParaRPr/>
           </a:p>
         </p:txBody>
       </p:sp>
